--- a/03-Slides/ETHAGT13/ETHAGT13-Apresentacao.pptx
+++ b/03-Slides/ETHAGT13/ETHAGT13-Apresentacao.pptx
@@ -11675,6 +11675,42 @@
         </p:nvSpPr>
         <p:spPr>
           <a:xfrm>
+            <a:off x="274320" y="6035040"/>
+            <a:ext cx="11612880" cy="320040"/>
+          </a:xfrm>
+          <a:prstGeom prst="rect">
+            <a:avLst/>
+          </a:prstGeom>
+          <a:noFill/>
+        </p:spPr>
+        <p:txBody>
+          <a:bodyPr wrap="square">
+            <a:spAutoFit/>
+          </a:bodyPr>
+          <a:lstStyle/>
+          <a:p>
+            <a:pPr algn="l">
+              <a:defRPr sz="900" b="0">
+                <a:solidFill>
+                  <a:srgbClr val="2980B9"/>
+                </a:solidFill>
+                <a:latin typeface="Segoe UI"/>
+              </a:defRPr>
+            </a:pPr>
+            <a:r>
+              <a:t>GDPR = General Data Protection Regulation — Regulamento de Protecao de Dados (EU)</a:t>
+            </a:r>
+          </a:p>
+        </p:txBody>
+      </p:sp>
+      <p:sp>
+        <p:nvSpPr>
+          <p:cNvPr id="8" name="TextBox 7"/>
+          <p:cNvSpPr txBox="1"/>
+          <p:nvPr/>
+        </p:nvSpPr>
+        <p:spPr>
+          <a:xfrm>
             <a:off x="274320" y="6400800"/>
             <a:ext cx="6400800" cy="365760"/>
           </a:xfrm>
@@ -11705,7 +11741,7 @@
       </p:sp>
       <p:sp>
         <p:nvSpPr>
-          <p:cNvPr id="8" name="TextBox 7"/>
+          <p:cNvPr id="9" name="TextBox 8"/>
           <p:cNvSpPr txBox="1"/>
           <p:nvPr/>
         </p:nvSpPr>
@@ -14555,6 +14591,42 @@
         </p:nvSpPr>
         <p:spPr>
           <a:xfrm>
+            <a:off x="274320" y="6035040"/>
+            <a:ext cx="11612880" cy="320040"/>
+          </a:xfrm>
+          <a:prstGeom prst="rect">
+            <a:avLst/>
+          </a:prstGeom>
+          <a:noFill/>
+        </p:spPr>
+        <p:txBody>
+          <a:bodyPr wrap="square">
+            <a:spAutoFit/>
+          </a:bodyPr>
+          <a:lstStyle/>
+          <a:p>
+            <a:pPr algn="l">
+              <a:defRPr sz="900" b="0">
+                <a:solidFill>
+                  <a:srgbClr val="2980B9"/>
+                </a:solidFill>
+                <a:latin typeface="Segoe UI"/>
+              </a:defRPr>
+            </a:pPr>
+            <a:r>
+              <a:t>HITL = Human-in-the-Loop — Humano no Ciclo  ·  LLM = Large Language Model — Modelo de Linguagem de Grande Escala</a:t>
+            </a:r>
+          </a:p>
+        </p:txBody>
+      </p:sp>
+      <p:sp>
+        <p:nvSpPr>
+          <p:cNvPr id="8" name="TextBox 7"/>
+          <p:cNvSpPr txBox="1"/>
+          <p:nvPr/>
+        </p:nvSpPr>
+        <p:spPr>
+          <a:xfrm>
             <a:off x="274320" y="6400800"/>
             <a:ext cx="6400800" cy="365760"/>
           </a:xfrm>
@@ -14585,7 +14657,7 @@
       </p:sp>
       <p:sp>
         <p:nvSpPr>
-          <p:cNvPr id="8" name="TextBox 7"/>
+          <p:cNvPr id="9" name="TextBox 8"/>
           <p:cNvSpPr txBox="1"/>
           <p:nvPr/>
         </p:nvSpPr>
@@ -18715,6 +18787,42 @@
         </p:nvSpPr>
         <p:spPr>
           <a:xfrm>
+            <a:off x="274320" y="6035040"/>
+            <a:ext cx="11612880" cy="320040"/>
+          </a:xfrm>
+          <a:prstGeom prst="rect">
+            <a:avLst/>
+          </a:prstGeom>
+          <a:noFill/>
+        </p:spPr>
+        <p:txBody>
+          <a:bodyPr wrap="square">
+            <a:spAutoFit/>
+          </a:bodyPr>
+          <a:lstStyle/>
+          <a:p>
+            <a:pPr algn="l">
+              <a:defRPr sz="900" b="0">
+                <a:solidFill>
+                  <a:srgbClr val="2980B9"/>
+                </a:solidFill>
+                <a:latin typeface="Segoe UI"/>
+              </a:defRPr>
+            </a:pPr>
+            <a:r>
+              <a:t>AgentOps = Agent Operations — operacao e monitoramento de agentes em producao  ·  MCP = Model Context Protocol — Protocolo de Contexto de Modelo</a:t>
+            </a:r>
+          </a:p>
+        </p:txBody>
+      </p:sp>
+      <p:sp>
+        <p:nvSpPr>
+          <p:cNvPr id="8" name="TextBox 7"/>
+          <p:cNvSpPr txBox="1"/>
+          <p:nvPr/>
+        </p:nvSpPr>
+        <p:spPr>
+          <a:xfrm>
             <a:off x="274320" y="6400800"/>
             <a:ext cx="6400800" cy="365760"/>
           </a:xfrm>
@@ -18745,7 +18853,7 @@
       </p:sp>
       <p:sp>
         <p:nvSpPr>
-          <p:cNvPr id="8" name="TextBox 7"/>
+          <p:cNvPr id="9" name="TextBox 8"/>
           <p:cNvSpPr txBox="1"/>
           <p:nvPr/>
         </p:nvSpPr>
@@ -23275,6 +23383,42 @@
         </p:nvSpPr>
         <p:spPr>
           <a:xfrm>
+            <a:off x="274320" y="6035040"/>
+            <a:ext cx="11612880" cy="320040"/>
+          </a:xfrm>
+          <a:prstGeom prst="rect">
+            <a:avLst/>
+          </a:prstGeom>
+          <a:noFill/>
+        </p:spPr>
+        <p:txBody>
+          <a:bodyPr wrap="square">
+            <a:spAutoFit/>
+          </a:bodyPr>
+          <a:lstStyle/>
+          <a:p>
+            <a:pPr algn="l">
+              <a:defRPr sz="900" b="0">
+                <a:solidFill>
+                  <a:srgbClr val="2980B9"/>
+                </a:solidFill>
+                <a:latin typeface="Segoe UI"/>
+              </a:defRPr>
+            </a:pPr>
+            <a:r>
+              <a:t>LGPD = Lei Geral de Protecao de Dados — lei brasileira de dados</a:t>
+            </a:r>
+          </a:p>
+        </p:txBody>
+      </p:sp>
+      <p:sp>
+        <p:nvSpPr>
+          <p:cNvPr id="8" name="TextBox 7"/>
+          <p:cNvSpPr txBox="1"/>
+          <p:nvPr/>
+        </p:nvSpPr>
+        <p:spPr>
+          <a:xfrm>
             <a:off x="274320" y="6400800"/>
             <a:ext cx="6400800" cy="365760"/>
           </a:xfrm>
@@ -23305,7 +23449,7 @@
       </p:sp>
       <p:sp>
         <p:nvSpPr>
-          <p:cNvPr id="8" name="TextBox 7"/>
+          <p:cNvPr id="9" name="TextBox 8"/>
           <p:cNvSpPr txBox="1"/>
           <p:nvPr/>
         </p:nvSpPr>
@@ -27715,6 +27859,42 @@
         </p:nvSpPr>
         <p:spPr>
           <a:xfrm>
+            <a:off x="274320" y="6035040"/>
+            <a:ext cx="11612880" cy="320040"/>
+          </a:xfrm>
+          <a:prstGeom prst="rect">
+            <a:avLst/>
+          </a:prstGeom>
+          <a:noFill/>
+        </p:spPr>
+        <p:txBody>
+          <a:bodyPr wrap="square">
+            <a:spAutoFit/>
+          </a:bodyPr>
+          <a:lstStyle/>
+          <a:p>
+            <a:pPr algn="l">
+              <a:defRPr sz="900" b="0">
+                <a:solidFill>
+                  <a:srgbClr val="2980B9"/>
+                </a:solidFill>
+                <a:latin typeface="Segoe UI"/>
+              </a:defRPr>
+            </a:pPr>
+            <a:r>
+              <a:t>RAG = Retrieval-Augmented Generation — Geracao Aumentada por Recuperacao</a:t>
+            </a:r>
+          </a:p>
+        </p:txBody>
+      </p:sp>
+      <p:sp>
+        <p:nvSpPr>
+          <p:cNvPr id="8" name="TextBox 7"/>
+          <p:cNvSpPr txBox="1"/>
+          <p:nvPr/>
+        </p:nvSpPr>
+        <p:spPr>
+          <a:xfrm>
             <a:off x="274320" y="6400800"/>
             <a:ext cx="6400800" cy="365760"/>
           </a:xfrm>
@@ -27745,7 +27925,7 @@
       </p:sp>
       <p:sp>
         <p:nvSpPr>
-          <p:cNvPr id="8" name="TextBox 7"/>
+          <p:cNvPr id="9" name="TextBox 8"/>
           <p:cNvSpPr txBox="1"/>
           <p:nvPr/>
         </p:nvSpPr>
@@ -28673,6 +28853,42 @@
         </p:nvSpPr>
         <p:spPr>
           <a:xfrm>
+            <a:off x="274320" y="6035040"/>
+            <a:ext cx="11612880" cy="320040"/>
+          </a:xfrm>
+          <a:prstGeom prst="rect">
+            <a:avLst/>
+          </a:prstGeom>
+          <a:noFill/>
+        </p:spPr>
+        <p:txBody>
+          <a:bodyPr wrap="square">
+            <a:spAutoFit/>
+          </a:bodyPr>
+          <a:lstStyle/>
+          <a:p>
+            <a:pPr algn="l">
+              <a:defRPr sz="900" b="0">
+                <a:solidFill>
+                  <a:srgbClr val="2980B9"/>
+                </a:solidFill>
+                <a:latin typeface="Segoe UI"/>
+              </a:defRPr>
+            </a:pPr>
+            <a:r>
+              <a:t>PR = Pull Request — requisicao de pull (GitHub)</a:t>
+            </a:r>
+          </a:p>
+        </p:txBody>
+      </p:sp>
+      <p:sp>
+        <p:nvSpPr>
+          <p:cNvPr id="8" name="TextBox 7"/>
+          <p:cNvSpPr txBox="1"/>
+          <p:nvPr/>
+        </p:nvSpPr>
+        <p:spPr>
+          <a:xfrm>
             <a:off x="274320" y="6400800"/>
             <a:ext cx="6400800" cy="365760"/>
           </a:xfrm>
@@ -28703,7 +28919,7 @@
       </p:sp>
       <p:sp>
         <p:nvSpPr>
-          <p:cNvPr id="8" name="TextBox 7"/>
+          <p:cNvPr id="9" name="TextBox 8"/>
           <p:cNvSpPr txBox="1"/>
           <p:nvPr/>
         </p:nvSpPr>
@@ -40177,6 +40393,42 @@
         </p:nvSpPr>
         <p:spPr>
           <a:xfrm>
+            <a:off x="274320" y="6035040"/>
+            <a:ext cx="11612880" cy="320040"/>
+          </a:xfrm>
+          <a:prstGeom prst="rect">
+            <a:avLst/>
+          </a:prstGeom>
+          <a:noFill/>
+        </p:spPr>
+        <p:txBody>
+          <a:bodyPr wrap="square">
+            <a:spAutoFit/>
+          </a:bodyPr>
+          <a:lstStyle/>
+          <a:p>
+            <a:pPr algn="l">
+              <a:defRPr sz="900" b="0">
+                <a:solidFill>
+                  <a:srgbClr val="2980B9"/>
+                </a:solidFill>
+                <a:latin typeface="Segoe UI"/>
+              </a:defRPr>
+            </a:pPr>
+            <a:r>
+              <a:t>PII = Personally Identifiable Information — dados pessoais identificaveis</a:t>
+            </a:r>
+          </a:p>
+        </p:txBody>
+      </p:sp>
+      <p:sp>
+        <p:nvSpPr>
+          <p:cNvPr id="8" name="TextBox 7"/>
+          <p:cNvSpPr txBox="1"/>
+          <p:nvPr/>
+        </p:nvSpPr>
+        <p:spPr>
+          <a:xfrm>
             <a:off x="274320" y="6400800"/>
             <a:ext cx="6400800" cy="365760"/>
           </a:xfrm>
@@ -40207,7 +40459,7 @@
       </p:sp>
       <p:sp>
         <p:nvSpPr>
-          <p:cNvPr id="8" name="TextBox 7"/>
+          <p:cNvPr id="9" name="TextBox 8"/>
           <p:cNvSpPr txBox="1"/>
           <p:nvPr/>
         </p:nvSpPr>
